--- a/Development_D1/Workshop/D1-W03_Apply_Workshop_L05-L06_My_Evening_and_My_Sisters_Evening.pptx
+++ b/Development_D1/Workshop/D1-W03_Apply_Workshop_L05-L06_My_Evening_and_My_Sisters_Evening.pptx
@@ -19633,7 +19633,7 @@
                 <a:latin typeface="Calibri" pitchFamily="34" charset="0"/>
                 <a:cs typeface="Amiri" pitchFamily="2" charset="-78"/>
               </a:rPr>
-              <a:t>STEP 9 · WRITE YOUR TEXT · ABOUT 70–90 WORDS</a:t>
+              <a:t>STEP 9 · WRITE YOUR TEXT · ABOUT 60–80 WORDS</a:t>
             </a:r>
             <a:endParaRPr lang="en-US" sz="1000" dirty="0"/>
           </a:p>
@@ -19885,7 +19885,7 @@
                 <a:latin typeface="Calibri" pitchFamily="34" charset="0"/>
                 <a:cs typeface="Amiri" pitchFamily="2" charset="-78"/>
               </a:rPr>
-              <a:t>Write an article (about 70–90 words) comparing your evening with a family member’s. Include: • your afternoon and evening in three phases, with times • two durations (‏</a:t>
+              <a:t>Write an article (about 60–80 words) comparing your evening with a family member’s. Include: • your afternoon and evening in three phases, with times • two durations (‏</a:t>
             </a:r>
             <a:pPr algn="l" indent="0" marL="0">
               <a:buNone/>
